--- a/Comprendre sa facture telephonique son forfait/Facture_telephone_INTERACTIF.pptx
+++ b/Comprendre sa facture telephonique son forfait/Facture_telephone_INTERACTIF.pptx
@@ -1585,6 +1585,46 @@
           </a:prstGeom>
         </p:spPr>
       </p:pic>
+      <p:sp>
+        <p:nvSpPr>
+          <p:cNvPr id="12" name="ZoneTexte 11">
+            <a:extLst>
+              <a:ext uri="{FF2B5EF4-FFF2-40B4-BE49-F238E27FC236}">
+                <a16:creationId xmlns:a16="http://schemas.microsoft.com/office/drawing/2014/main" id="{854BED4C-344E-4F75-496C-F36CF2A2947A}"/>
+              </a:ext>
+            </a:extLst>
+          </p:cNvPr>
+          <p:cNvSpPr txBox="1"/>
+          <p:nvPr/>
+        </p:nvSpPr>
+        <p:spPr>
+          <a:xfrm>
+            <a:off x="0" y="4864100"/>
+            <a:ext cx="9144000" cy="230832"/>
+          </a:xfrm>
+          <a:prstGeom prst="rect">
+            <a:avLst/>
+          </a:prstGeom>
+          <a:noFill/>
+        </p:spPr>
+        <p:txBody>
+          <a:bodyPr vert="horz" rtlCol="0">
+            <a:spAutoFit/>
+          </a:bodyPr>
+          <a:lstStyle/>
+          <a:p>
+            <a:pPr algn="ctr"/>
+            <a:r>
+              <a:rPr lang="fr-FR" sz="900">
+                <a:solidFill>
+                  <a:srgbClr val="B4B4B4"/>
+                </a:solidFill>
+              </a:rPr>
+              <a:t>(c) titi_23 - mediateur-numerique.github.io - Reproduction interdite sans autorisation</a:t>
+            </a:r>
+          </a:p>
+        </p:txBody>
+      </p:sp>
     </p:spTree>
   </p:cSld>
   <p:clrMapOvr>
@@ -2373,6 +2413,46 @@
           </a:p>
         </p:txBody>
       </p:sp>
+      <p:sp>
+        <p:nvSpPr>
+          <p:cNvPr id="22" name="ZoneTexte 21">
+            <a:extLst>
+              <a:ext uri="{FF2B5EF4-FFF2-40B4-BE49-F238E27FC236}">
+                <a16:creationId xmlns:a16="http://schemas.microsoft.com/office/drawing/2014/main" id="{33F8EDB1-439D-FAE7-AACD-5DB447A5888C}"/>
+              </a:ext>
+            </a:extLst>
+          </p:cNvPr>
+          <p:cNvSpPr txBox="1"/>
+          <p:nvPr/>
+        </p:nvSpPr>
+        <p:spPr>
+          <a:xfrm>
+            <a:off x="0" y="4864100"/>
+            <a:ext cx="9144000" cy="230832"/>
+          </a:xfrm>
+          <a:prstGeom prst="rect">
+            <a:avLst/>
+          </a:prstGeom>
+          <a:noFill/>
+        </p:spPr>
+        <p:txBody>
+          <a:bodyPr vert="horz" rtlCol="0">
+            <a:spAutoFit/>
+          </a:bodyPr>
+          <a:lstStyle/>
+          <a:p>
+            <a:pPr algn="ctr"/>
+            <a:r>
+              <a:rPr lang="fr-FR" sz="900">
+                <a:solidFill>
+                  <a:srgbClr val="B4B4B4"/>
+                </a:solidFill>
+              </a:rPr>
+              <a:t>(c) titi_23 - mediateur-numerique.github.io - Reproduction interdite sans autorisation</a:t>
+            </a:r>
+          </a:p>
+        </p:txBody>
+      </p:sp>
     </p:spTree>
   </p:cSld>
   <p:clrMapOvr>
@@ -3472,6 +3552,46 @@
           </a:p>
         </p:txBody>
       </p:sp>
+      <p:sp>
+        <p:nvSpPr>
+          <p:cNvPr id="30" name="ZoneTexte 29">
+            <a:extLst>
+              <a:ext uri="{FF2B5EF4-FFF2-40B4-BE49-F238E27FC236}">
+                <a16:creationId xmlns:a16="http://schemas.microsoft.com/office/drawing/2014/main" id="{CC885820-E3F4-A60D-D359-B4A3E63191F9}"/>
+              </a:ext>
+            </a:extLst>
+          </p:cNvPr>
+          <p:cNvSpPr txBox="1"/>
+          <p:nvPr/>
+        </p:nvSpPr>
+        <p:spPr>
+          <a:xfrm>
+            <a:off x="0" y="4864100"/>
+            <a:ext cx="9144000" cy="230832"/>
+          </a:xfrm>
+          <a:prstGeom prst="rect">
+            <a:avLst/>
+          </a:prstGeom>
+          <a:noFill/>
+        </p:spPr>
+        <p:txBody>
+          <a:bodyPr vert="horz" rtlCol="0">
+            <a:spAutoFit/>
+          </a:bodyPr>
+          <a:lstStyle/>
+          <a:p>
+            <a:pPr algn="ctr"/>
+            <a:r>
+              <a:rPr lang="fr-FR" sz="900">
+                <a:solidFill>
+                  <a:srgbClr val="B4B4B4"/>
+                </a:solidFill>
+              </a:rPr>
+              <a:t>(c) titi_23 - mediateur-numerique.github.io - Reproduction interdite sans autorisation</a:t>
+            </a:r>
+          </a:p>
+        </p:txBody>
+      </p:sp>
     </p:spTree>
   </p:cSld>
   <p:clrMapOvr>
@@ -3694,6 +3814,46 @@
           </a:p>
         </p:txBody>
       </p:sp>
+      <p:sp>
+        <p:nvSpPr>
+          <p:cNvPr id="2" name="ZoneTexte 1">
+            <a:extLst>
+              <a:ext uri="{FF2B5EF4-FFF2-40B4-BE49-F238E27FC236}">
+                <a16:creationId xmlns:a16="http://schemas.microsoft.com/office/drawing/2014/main" id="{0F9B4AE4-8450-A764-5BEB-B0686D3FC164}"/>
+              </a:ext>
+            </a:extLst>
+          </p:cNvPr>
+          <p:cNvSpPr txBox="1"/>
+          <p:nvPr/>
+        </p:nvSpPr>
+        <p:spPr>
+          <a:xfrm>
+            <a:off x="0" y="4864100"/>
+            <a:ext cx="9144000" cy="230832"/>
+          </a:xfrm>
+          <a:prstGeom prst="rect">
+            <a:avLst/>
+          </a:prstGeom>
+          <a:noFill/>
+        </p:spPr>
+        <p:txBody>
+          <a:bodyPr vert="horz" rtlCol="0">
+            <a:spAutoFit/>
+          </a:bodyPr>
+          <a:lstStyle/>
+          <a:p>
+            <a:pPr algn="ctr"/>
+            <a:r>
+              <a:rPr lang="fr-FR" sz="900">
+                <a:solidFill>
+                  <a:srgbClr val="B4B4B4"/>
+                </a:solidFill>
+              </a:rPr>
+              <a:t>(c) titi_23 - mediateur-numerique.github.io - Reproduction interdite sans autorisation</a:t>
+            </a:r>
+          </a:p>
+        </p:txBody>
+      </p:sp>
     </p:spTree>
   </p:cSld>
   <p:clrMapOvr>
@@ -4245,6 +4405,46 @@
           </a:p>
         </p:txBody>
       </p:sp>
+      <p:sp>
+        <p:nvSpPr>
+          <p:cNvPr id="2" name="ZoneTexte 1">
+            <a:extLst>
+              <a:ext uri="{FF2B5EF4-FFF2-40B4-BE49-F238E27FC236}">
+                <a16:creationId xmlns:a16="http://schemas.microsoft.com/office/drawing/2014/main" id="{A0B7A6B2-C339-B7FF-0FAE-C3D835028D54}"/>
+              </a:ext>
+            </a:extLst>
+          </p:cNvPr>
+          <p:cNvSpPr txBox="1"/>
+          <p:nvPr/>
+        </p:nvSpPr>
+        <p:spPr>
+          <a:xfrm>
+            <a:off x="0" y="4864100"/>
+            <a:ext cx="9144000" cy="230832"/>
+          </a:xfrm>
+          <a:prstGeom prst="rect">
+            <a:avLst/>
+          </a:prstGeom>
+          <a:noFill/>
+        </p:spPr>
+        <p:txBody>
+          <a:bodyPr vert="horz" rtlCol="0">
+            <a:spAutoFit/>
+          </a:bodyPr>
+          <a:lstStyle/>
+          <a:p>
+            <a:pPr algn="ctr"/>
+            <a:r>
+              <a:rPr lang="fr-FR" sz="900">
+                <a:solidFill>
+                  <a:srgbClr val="B4B4B4"/>
+                </a:solidFill>
+              </a:rPr>
+              <a:t>(c) titi_23 - mediateur-numerique.github.io - Reproduction interdite sans autorisation</a:t>
+            </a:r>
+          </a:p>
+        </p:txBody>
+      </p:sp>
     </p:spTree>
   </p:cSld>
   <p:clrMapOvr>
@@ -5330,6 +5530,46 @@
           </a:p>
         </p:txBody>
       </p:sp>
+      <p:sp>
+        <p:nvSpPr>
+          <p:cNvPr id="29" name="ZoneTexte 28">
+            <a:extLst>
+              <a:ext uri="{FF2B5EF4-FFF2-40B4-BE49-F238E27FC236}">
+                <a16:creationId xmlns:a16="http://schemas.microsoft.com/office/drawing/2014/main" id="{390F5953-5B95-9CED-1391-C1AEBD073C54}"/>
+              </a:ext>
+            </a:extLst>
+          </p:cNvPr>
+          <p:cNvSpPr txBox="1"/>
+          <p:nvPr/>
+        </p:nvSpPr>
+        <p:spPr>
+          <a:xfrm>
+            <a:off x="0" y="4864100"/>
+            <a:ext cx="9144000" cy="230832"/>
+          </a:xfrm>
+          <a:prstGeom prst="rect">
+            <a:avLst/>
+          </a:prstGeom>
+          <a:noFill/>
+        </p:spPr>
+        <p:txBody>
+          <a:bodyPr vert="horz" rtlCol="0">
+            <a:spAutoFit/>
+          </a:bodyPr>
+          <a:lstStyle/>
+          <a:p>
+            <a:pPr algn="ctr"/>
+            <a:r>
+              <a:rPr lang="fr-FR" sz="900">
+                <a:solidFill>
+                  <a:srgbClr val="B4B4B4"/>
+                </a:solidFill>
+              </a:rPr>
+              <a:t>(c) titi_23 - mediateur-numerique.github.io - Reproduction interdite sans autorisation</a:t>
+            </a:r>
+          </a:p>
+        </p:txBody>
+      </p:sp>
     </p:spTree>
   </p:cSld>
   <p:clrMapOvr>
@@ -6241,6 +6481,46 @@
           </a:p>
         </p:txBody>
       </p:sp>
+      <p:sp>
+        <p:nvSpPr>
+          <p:cNvPr id="4" name="ZoneTexte 3">
+            <a:extLst>
+              <a:ext uri="{FF2B5EF4-FFF2-40B4-BE49-F238E27FC236}">
+                <a16:creationId xmlns:a16="http://schemas.microsoft.com/office/drawing/2014/main" id="{E7D3FA61-C6C2-5B5D-3A3D-ECE8DE80DFFF}"/>
+              </a:ext>
+            </a:extLst>
+          </p:cNvPr>
+          <p:cNvSpPr txBox="1"/>
+          <p:nvPr/>
+        </p:nvSpPr>
+        <p:spPr>
+          <a:xfrm>
+            <a:off x="0" y="4864100"/>
+            <a:ext cx="9144000" cy="230832"/>
+          </a:xfrm>
+          <a:prstGeom prst="rect">
+            <a:avLst/>
+          </a:prstGeom>
+          <a:noFill/>
+        </p:spPr>
+        <p:txBody>
+          <a:bodyPr vert="horz" rtlCol="0">
+            <a:spAutoFit/>
+          </a:bodyPr>
+          <a:lstStyle/>
+          <a:p>
+            <a:pPr algn="ctr"/>
+            <a:r>
+              <a:rPr lang="fr-FR" sz="900">
+                <a:solidFill>
+                  <a:srgbClr val="B4B4B4"/>
+                </a:solidFill>
+              </a:rPr>
+              <a:t>(c) titi_23 - mediateur-numerique.github.io - Reproduction interdite sans autorisation</a:t>
+            </a:r>
+          </a:p>
+        </p:txBody>
+      </p:sp>
     </p:spTree>
   </p:cSld>
   <p:clrMapOvr>
@@ -7256,6 +7536,46 @@
                 </a:solidFill>
               </a:rPr>
               <a:t>Yggdrasil · Cédric WALTENER · Médiateur Numérique · 2026</a:t>
+            </a:r>
+          </a:p>
+        </p:txBody>
+      </p:sp>
+      <p:sp>
+        <p:nvSpPr>
+          <p:cNvPr id="25" name="ZoneTexte 24">
+            <a:extLst>
+              <a:ext uri="{FF2B5EF4-FFF2-40B4-BE49-F238E27FC236}">
+                <a16:creationId xmlns:a16="http://schemas.microsoft.com/office/drawing/2014/main" id="{99F6DD0C-4910-F932-EA6D-2CE6ADB43CEB}"/>
+              </a:ext>
+            </a:extLst>
+          </p:cNvPr>
+          <p:cNvSpPr txBox="1"/>
+          <p:nvPr/>
+        </p:nvSpPr>
+        <p:spPr>
+          <a:xfrm>
+            <a:off x="0" y="4864100"/>
+            <a:ext cx="9144000" cy="230832"/>
+          </a:xfrm>
+          <a:prstGeom prst="rect">
+            <a:avLst/>
+          </a:prstGeom>
+          <a:noFill/>
+        </p:spPr>
+        <p:txBody>
+          <a:bodyPr vert="horz" rtlCol="0">
+            <a:spAutoFit/>
+          </a:bodyPr>
+          <a:lstStyle/>
+          <a:p>
+            <a:pPr algn="ctr"/>
+            <a:r>
+              <a:rPr lang="fr-FR" sz="900">
+                <a:solidFill>
+                  <a:srgbClr val="B4B4B4"/>
+                </a:solidFill>
+              </a:rPr>
+              <a:t>(c) titi_23 - mediateur-numerique.github.io - Reproduction interdite sans autorisation</a:t>
             </a:r>
           </a:p>
         </p:txBody>
@@ -8908,6 +9228,46 @@
           </a:p>
         </p:txBody>
       </p:sp>
+      <p:sp>
+        <p:nvSpPr>
+          <p:cNvPr id="4" name="ZoneTexte 3">
+            <a:extLst>
+              <a:ext uri="{FF2B5EF4-FFF2-40B4-BE49-F238E27FC236}">
+                <a16:creationId xmlns:a16="http://schemas.microsoft.com/office/drawing/2014/main" id="{A4ACE45A-3175-4531-B837-E7F95CE28F3A}"/>
+              </a:ext>
+            </a:extLst>
+          </p:cNvPr>
+          <p:cNvSpPr txBox="1"/>
+          <p:nvPr/>
+        </p:nvSpPr>
+        <p:spPr>
+          <a:xfrm>
+            <a:off x="0" y="4864100"/>
+            <a:ext cx="9144000" cy="230832"/>
+          </a:xfrm>
+          <a:prstGeom prst="rect">
+            <a:avLst/>
+          </a:prstGeom>
+          <a:noFill/>
+        </p:spPr>
+        <p:txBody>
+          <a:bodyPr vert="horz" rtlCol="0">
+            <a:spAutoFit/>
+          </a:bodyPr>
+          <a:lstStyle/>
+          <a:p>
+            <a:pPr algn="ctr"/>
+            <a:r>
+              <a:rPr lang="fr-FR" sz="900">
+                <a:solidFill>
+                  <a:srgbClr val="B4B4B4"/>
+                </a:solidFill>
+              </a:rPr>
+              <a:t>(c) titi_23 - mediateur-numerique.github.io - Reproduction interdite sans autorisation</a:t>
+            </a:r>
+          </a:p>
+        </p:txBody>
+      </p:sp>
     </p:spTree>
   </p:cSld>
   <p:clrMapOvr>
@@ -10074,6 +10434,46 @@
           </a:p>
         </p:txBody>
       </p:sp>
+      <p:sp>
+        <p:nvSpPr>
+          <p:cNvPr id="31" name="ZoneTexte 30">
+            <a:extLst>
+              <a:ext uri="{FF2B5EF4-FFF2-40B4-BE49-F238E27FC236}">
+                <a16:creationId xmlns:a16="http://schemas.microsoft.com/office/drawing/2014/main" id="{2C5D50B0-8FA7-B8AE-C2AF-F0A817E7F1C3}"/>
+              </a:ext>
+            </a:extLst>
+          </p:cNvPr>
+          <p:cNvSpPr txBox="1"/>
+          <p:nvPr/>
+        </p:nvSpPr>
+        <p:spPr>
+          <a:xfrm>
+            <a:off x="0" y="4864100"/>
+            <a:ext cx="9144000" cy="230832"/>
+          </a:xfrm>
+          <a:prstGeom prst="rect">
+            <a:avLst/>
+          </a:prstGeom>
+          <a:noFill/>
+        </p:spPr>
+        <p:txBody>
+          <a:bodyPr vert="horz" rtlCol="0">
+            <a:spAutoFit/>
+          </a:bodyPr>
+          <a:lstStyle/>
+          <a:p>
+            <a:pPr algn="ctr"/>
+            <a:r>
+              <a:rPr lang="fr-FR" sz="900">
+                <a:solidFill>
+                  <a:srgbClr val="B4B4B4"/>
+                </a:solidFill>
+              </a:rPr>
+              <a:t>(c) titi_23 - mediateur-numerique.github.io - Reproduction interdite sans autorisation</a:t>
+            </a:r>
+          </a:p>
+        </p:txBody>
+      </p:sp>
     </p:spTree>
   </p:cSld>
   <p:clrMapOvr>
@@ -10862,6 +11262,46 @@
           </a:p>
         </p:txBody>
       </p:sp>
+      <p:sp>
+        <p:nvSpPr>
+          <p:cNvPr id="22" name="ZoneTexte 21">
+            <a:extLst>
+              <a:ext uri="{FF2B5EF4-FFF2-40B4-BE49-F238E27FC236}">
+                <a16:creationId xmlns:a16="http://schemas.microsoft.com/office/drawing/2014/main" id="{A56A2CBC-82A1-3707-207D-EBA85853BBEA}"/>
+              </a:ext>
+            </a:extLst>
+          </p:cNvPr>
+          <p:cNvSpPr txBox="1"/>
+          <p:nvPr/>
+        </p:nvSpPr>
+        <p:spPr>
+          <a:xfrm>
+            <a:off x="0" y="4864100"/>
+            <a:ext cx="9144000" cy="230832"/>
+          </a:xfrm>
+          <a:prstGeom prst="rect">
+            <a:avLst/>
+          </a:prstGeom>
+          <a:noFill/>
+        </p:spPr>
+        <p:txBody>
+          <a:bodyPr vert="horz" rtlCol="0">
+            <a:spAutoFit/>
+          </a:bodyPr>
+          <a:lstStyle/>
+          <a:p>
+            <a:pPr algn="ctr"/>
+            <a:r>
+              <a:rPr lang="fr-FR" sz="900">
+                <a:solidFill>
+                  <a:srgbClr val="B4B4B4"/>
+                </a:solidFill>
+              </a:rPr>
+              <a:t>(c) titi_23 - mediateur-numerique.github.io - Reproduction interdite sans autorisation</a:t>
+            </a:r>
+          </a:p>
+        </p:txBody>
+      </p:sp>
     </p:spTree>
   </p:cSld>
   <p:clrMapOvr>
@@ -11646,6 +12086,46 @@
                 </a:solidFill>
               </a:rPr>
               <a:t>Yggdrasil · Cédric WALTENER · Médiateur Numérique · 2026</a:t>
+            </a:r>
+          </a:p>
+        </p:txBody>
+      </p:sp>
+      <p:sp>
+        <p:nvSpPr>
+          <p:cNvPr id="22" name="ZoneTexte 21">
+            <a:extLst>
+              <a:ext uri="{FF2B5EF4-FFF2-40B4-BE49-F238E27FC236}">
+                <a16:creationId xmlns:a16="http://schemas.microsoft.com/office/drawing/2014/main" id="{F05386DB-0250-A079-AAB6-0ED40243A670}"/>
+              </a:ext>
+            </a:extLst>
+          </p:cNvPr>
+          <p:cNvSpPr txBox="1"/>
+          <p:nvPr/>
+        </p:nvSpPr>
+        <p:spPr>
+          <a:xfrm>
+            <a:off x="0" y="4864100"/>
+            <a:ext cx="9144000" cy="230832"/>
+          </a:xfrm>
+          <a:prstGeom prst="rect">
+            <a:avLst/>
+          </a:prstGeom>
+          <a:noFill/>
+        </p:spPr>
+        <p:txBody>
+          <a:bodyPr vert="horz" rtlCol="0">
+            <a:spAutoFit/>
+          </a:bodyPr>
+          <a:lstStyle/>
+          <a:p>
+            <a:pPr algn="ctr"/>
+            <a:r>
+              <a:rPr lang="fr-FR" sz="900">
+                <a:solidFill>
+                  <a:srgbClr val="B4B4B4"/>
+                </a:solidFill>
+              </a:rPr>
+              <a:t>(c) titi_23 - mediateur-numerique.github.io - Reproduction interdite sans autorisation</a:t>
             </a:r>
           </a:p>
         </p:txBody>
